--- a/content/ai-enablement/ai-enablement-3-expert.pptx
+++ b/content/ai-enablement/ai-enablement-3-expert.pptx
@@ -4358,7 +4358,7 @@
                 </a:solidFill>
                 <a:latin typeface="Calibri"/>
               </a:rPr>
-              <a:t>DECKFM · AI ENABLEMENT SERIES · PART 3 OF 3</a:t>
+              <a:t>OZ RADIO · AI ENABLEMENT SERIES · PART 3 OF 3</a:t>
             </a:r>
           </a:p>
         </p:txBody>
@@ -5202,7 +5202,7 @@
                 </a:solidFill>
                 <a:latin typeface="Calibri"/>
               </a:rPr>
-              <a:t>DeckFM · AI enablement · Expert</a:t>
+              <a:t>Oz Radio · AI enablement · Expert</a:t>
             </a:r>
           </a:p>
         </p:txBody>
@@ -6077,7 +6077,7 @@
                 </a:solidFill>
                 <a:latin typeface="Calibri"/>
               </a:rPr>
-              <a:t>DeckFM · AI enablement · Expert</a:t>
+              <a:t>Oz Radio · AI enablement · Expert</a:t>
             </a:r>
           </a:p>
         </p:txBody>
@@ -8106,7 +8106,7 @@
                 </a:solidFill>
                 <a:latin typeface="Calibri"/>
               </a:rPr>
-              <a:t>DeckFM · AI enablement · Expert</a:t>
+              <a:t>Oz Radio · AI enablement · Expert</a:t>
             </a:r>
           </a:p>
         </p:txBody>
@@ -8746,7 +8746,7 @@
                 </a:solidFill>
                 <a:latin typeface="Calibri"/>
               </a:rPr>
-              <a:t>DeckFM · AI enablement · Expert</a:t>
+              <a:t>Oz Radio · AI enablement · Expert</a:t>
             </a:r>
           </a:p>
         </p:txBody>
@@ -11898,7 +11898,7 @@
                 </a:solidFill>
                 <a:latin typeface="Calibri"/>
               </a:rPr>
-              <a:t>DeckFM · AI enablement · Expert</a:t>
+              <a:t>Oz Radio · AI enablement · Expert</a:t>
             </a:r>
           </a:p>
         </p:txBody>
@@ -12669,7 +12669,7 @@
                 </a:solidFill>
                 <a:latin typeface="Calibri"/>
               </a:rPr>
-              <a:t>DeckFM · AI enablement · Expert</a:t>
+              <a:t>Oz Radio · AI enablement · Expert</a:t>
             </a:r>
           </a:p>
         </p:txBody>
@@ -13577,7 +13577,7 @@
                 </a:solidFill>
                 <a:latin typeface="Calibri"/>
               </a:rPr>
-              <a:t>DeckFM · AI enablement · Expert</a:t>
+              <a:t>Oz Radio · AI enablement · Expert</a:t>
             </a:r>
           </a:p>
         </p:txBody>
@@ -14411,7 +14411,7 @@
                 </a:solidFill>
                 <a:latin typeface="Calibri"/>
               </a:rPr>
-              <a:t>DeckFM · AI enablement · Expert</a:t>
+              <a:t>Oz Radio · AI enablement · Expert</a:t>
             </a:r>
           </a:p>
         </p:txBody>
@@ -15344,7 +15344,7 @@
                 </a:solidFill>
                 <a:latin typeface="Calibri"/>
               </a:rPr>
-              <a:t>DeckFM · AI enablement · Expert</a:t>
+              <a:t>Oz Radio · AI enablement · Expert</a:t>
             </a:r>
           </a:p>
         </p:txBody>
@@ -16303,7 +16303,7 @@
                 </a:solidFill>
                 <a:latin typeface="Calibri"/>
               </a:rPr>
-              <a:t>DeckFM · AI enablement · Expert</a:t>
+              <a:t>Oz Radio · AI enablement · Expert</a:t>
             </a:r>
           </a:p>
         </p:txBody>
@@ -17588,7 +17588,7 @@
                 </a:solidFill>
                 <a:latin typeface="Calibri"/>
               </a:rPr>
-              <a:t>DeckFM · AI enablement · Expert</a:t>
+              <a:t>Oz Radio · AI enablement · Expert</a:t>
             </a:r>
           </a:p>
         </p:txBody>
@@ -18362,7 +18362,7 @@
                 </a:solidFill>
                 <a:latin typeface="Calibri"/>
               </a:rPr>
-              <a:t>DeckFM · AI enablement · Expert</a:t>
+              <a:t>Oz Radio · AI enablement · Expert</a:t>
             </a:r>
           </a:p>
         </p:txBody>
